--- a/knf/decks/d3p2.pptx
+++ b/knf/decks/d3p2.pptx
@@ -3941,7 +3941,7 @@
                 <a:ea typeface="Pretendard"/>
                 <a:cs typeface="Pretendard"/>
               </a:rPr>
-              <a:t>소결 피벗 합계 SF-02 PM후 8,791 · PM전 6,313</a:t>
+              <a:t>소결 피벗 합계 SF-02 8/10후 8,791 · 8/10전 6,313</a:t>
             </a:r>
           </a:p>
         </p:txBody>
@@ -5810,7 +5810,7 @@
                 <a:ea typeface="Pretendard"/>
                 <a:cs typeface="Pretendard"/>
               </a:rPr>
-              <a:t>설비 × PM 전/후 × 불량유형으로 쪼개고 일평균으로 비교한다</a:t>
+              <a:t>설비 × 8/10 전/후 × 불량유형으로 쪼개고 일평균으로 비교한다</a:t>
             </a:r>
           </a:p>
         </p:txBody>
@@ -5956,7 +5956,7 @@
                 <a:ea typeface="Pretendard"/>
                 <a:cs typeface="Pretendard"/>
               </a:rPr>
-              <a:t>PM 뒤 가장 많이 늘어난 불량 유형을 숫자로 말한다</a:t>
+              <a:t>8/10 뒤 가장 많이 늘어난 불량 유형을 숫자로 말한다</a:t>
             </a:r>
           </a:p>
         </p:txBody>
@@ -6655,7 +6655,7 @@
                 <a:ea typeface="Pretendard"/>
                 <a:cs typeface="Pretendard"/>
               </a:rPr>
-              <a:t>1. PM구분</a:t>
+              <a:t>1. 기간구분</a:t>
             </a:r>
           </a:p>
         </p:txBody>
@@ -6860,7 +6860,7 @@
                 <a:ea typeface="Pretendard"/>
                 <a:cs typeface="Pretendard"/>
               </a:rPr>
-              <a:t>설비 × PM</a:t>
+              <a:t>설비 × 8/10</a:t>
             </a:r>
           </a:p>
           <a:p>
@@ -7672,7 +7672,7 @@
                 <a:ea typeface="Pretendard"/>
                 <a:cs typeface="Pretendard"/>
               </a:rPr>
-              <a:t>PM구분 수식과 피벗 배치</a:t>
+              <a:t>기간구분 수식과 피벗 배치</a:t>
             </a:r>
           </a:p>
         </p:txBody>
@@ -7846,7 +7846,7 @@
                 <a:ea typeface="Pretendard"/>
                 <a:cs typeface="Pretendard"/>
               </a:rPr>
-              <a:t>=IF(--A2&gt;=DATE(2026,8,10),"PM후","PM전")</a:t>
+              <a:t>=IF(--A2&gt;=DATE(2026,8,10),"8/10후","8/10전")</a:t>
             </a:r>
           </a:p>
         </p:txBody>
@@ -8278,7 +8278,7 @@
                 <a:ea typeface="Pretendard"/>
                 <a:cs typeface="Pretendard"/>
               </a:rPr>
-              <a:t>설비 → PM구분</a:t>
+              <a:t>설비 → 기간구분</a:t>
             </a:r>
           </a:p>
         </p:txBody>
@@ -11066,7 +11066,7 @@
                 <a:ea typeface="Pretendard"/>
                 <a:cs typeface="Pretendard"/>
               </a:rPr>
-              <a:t>합계 확인용 — SF-02 PM후 8,791 · PM전 6,313 이 나와야 한다</a:t>
+              <a:t>합계 확인용 — SF-02 8/10후 8,791 · 8/10전 6,313 이 나와야 한다</a:t>
             </a:r>
           </a:p>
         </p:txBody>
@@ -11480,7 +11480,7 @@
                 <a:ea typeface="Pretendard"/>
                 <a:cs typeface="Pretendard"/>
               </a:rPr>
-              <a:t>PM 후 22일은 PM 전 40일의 절반 남짓</a:t>
+              <a:t>8/10 후 22일은 8/10 전 40일의 절반 남짓</a:t>
             </a:r>
           </a:p>
         </p:txBody>
@@ -12579,7 +12579,7 @@
                 <a:ea typeface="Pretendard"/>
                 <a:cs typeface="Pretendard"/>
               </a:rPr>
-              <a:t>PM 뒤 가장 많이 늘어난 유형은 균열</a:t>
+              <a:t>8/10 뒤 가장 많이 늘어난 유형은 균열</a:t>
             </a:r>
           </a:p>
         </p:txBody>
@@ -14505,7 +14505,7 @@
                 <a:ea typeface="Pretendard"/>
                 <a:cs typeface="Pretendard"/>
               </a:rPr>
-              <a:t>SF-02 PM후 불량 8,791개 중 균열 3,535개(40.2%) — PM 전 비중 28.9%</a:t>
+              <a:t>SF-02 8/10후 불량 8,791개 중 균열 3,535개(40.2%) — 8/10 전 비중 28.9%</a:t>
             </a:r>
           </a:p>
         </p:txBody>

--- a/knf/decks/d3p2.pptx
+++ b/knf/decks/d3p2.pptx
@@ -5634,7 +5634,7 @@
                 <a:ea typeface="Pretendard"/>
                 <a:cs typeface="Pretendard"/>
               </a:rPr>
-              <a:t>45분 뒤에는</a:t>
+              <a:t>50분 뒤에는</a:t>
             </a:r>
           </a:p>
         </p:txBody>

--- a/knf/decks/d3p2.pptx
+++ b/knf/decks/d3p2.pptx
@@ -3100,7 +3100,7 @@
       <p:grpSpPr/>
       <p:sp>
         <p:nvSpPr>
-          <p:cNvPr id="2" name="Oval 1"/>
+          <p:cNvPr id="2" name="deckgen:decor"/>
           <p:cNvSpPr/>
           <p:nvPr/>
         </p:nvSpPr>
@@ -3130,7 +3130,7 @@
       </p:sp>
       <p:sp>
         <p:nvSpPr>
-          <p:cNvPr id="3" name="Oval 2"/>
+          <p:cNvPr id="3" name="deckgen:decor"/>
           <p:cNvSpPr/>
           <p:nvPr/>
         </p:nvSpPr>
@@ -3160,7 +3160,7 @@
       </p:sp>
       <p:sp>
         <p:nvSpPr>
-          <p:cNvPr id="4" name="Oval 3"/>
+          <p:cNvPr id="4" name="deckgen:decor"/>
           <p:cNvSpPr/>
           <p:nvPr/>
         </p:nvSpPr>
@@ -3190,7 +3190,7 @@
       </p:sp>
       <p:sp>
         <p:nvSpPr>
-          <p:cNvPr id="5" name="Rectangle 4"/>
+          <p:cNvPr id="5" name="deckgen:decor"/>
           <p:cNvSpPr/>
           <p:nvPr/>
         </p:nvSpPr>
@@ -3220,7 +3220,7 @@
       </p:sp>
       <p:sp>
         <p:nvSpPr>
-          <p:cNvPr id="6" name="Oval 5"/>
+          <p:cNvPr id="6" name="deckgen:decor"/>
           <p:cNvSpPr/>
           <p:nvPr/>
         </p:nvSpPr>
@@ -3250,7 +3250,7 @@
       </p:sp>
       <p:sp>
         <p:nvSpPr>
-          <p:cNvPr id="7" name="Oval 6"/>
+          <p:cNvPr id="7" name="deckgen:decor"/>
           <p:cNvSpPr/>
           <p:nvPr/>
         </p:nvSpPr>
@@ -3280,7 +3280,7 @@
       </p:sp>
       <p:sp>
         <p:nvSpPr>
-          <p:cNvPr id="8" name="Oval 7"/>
+          <p:cNvPr id="8" name="deckgen:decor"/>
           <p:cNvSpPr/>
           <p:nvPr/>
         </p:nvSpPr>
@@ -3310,7 +3310,7 @@
       </p:sp>
       <p:sp>
         <p:nvSpPr>
-          <p:cNvPr id="9" name="Oval 8"/>
+          <p:cNvPr id="9" name="deckgen:decor"/>
           <p:cNvSpPr/>
           <p:nvPr/>
         </p:nvSpPr>
@@ -3340,7 +3340,7 @@
       </p:sp>
       <p:sp>
         <p:nvSpPr>
-          <p:cNvPr id="10" name="Rectangle 9"/>
+          <p:cNvPr id="10" name="deckgen:decor"/>
           <p:cNvSpPr/>
           <p:nvPr/>
         </p:nvSpPr>
@@ -3600,7 +3600,7 @@
       <p:grpSpPr/>
       <p:sp>
         <p:nvSpPr>
-          <p:cNvPr id="2" name="Oval 1"/>
+          <p:cNvPr id="2" name="deckgen:decor"/>
           <p:cNvSpPr/>
           <p:nvPr/>
         </p:nvSpPr>
@@ -3630,7 +3630,7 @@
       </p:sp>
       <p:sp>
         <p:nvSpPr>
-          <p:cNvPr id="3" name="Oval 2"/>
+          <p:cNvPr id="3" name="deckgen:decor"/>
           <p:cNvSpPr/>
           <p:nvPr/>
         </p:nvSpPr>
@@ -3660,7 +3660,7 @@
       </p:sp>
       <p:sp>
         <p:nvSpPr>
-          <p:cNvPr id="4" name="Oval 3"/>
+          <p:cNvPr id="4" name="deckgen:decor"/>
           <p:cNvSpPr/>
           <p:nvPr/>
         </p:nvSpPr>
@@ -4662,7 +4662,7 @@
       <p:grpSpPr/>
       <p:sp>
         <p:nvSpPr>
-          <p:cNvPr id="2" name="Oval 1"/>
+          <p:cNvPr id="2" name="deckgen:decor"/>
           <p:cNvSpPr/>
           <p:nvPr/>
         </p:nvSpPr>
@@ -4692,7 +4692,7 @@
       </p:sp>
       <p:sp>
         <p:nvSpPr>
-          <p:cNvPr id="3" name="Oval 2"/>
+          <p:cNvPr id="3" name="deckgen:decor"/>
           <p:cNvSpPr/>
           <p:nvPr/>
         </p:nvSpPr>
@@ -5469,7 +5469,7 @@
       <p:grpSpPr/>
       <p:sp>
         <p:nvSpPr>
-          <p:cNvPr id="2" name="Oval 1"/>
+          <p:cNvPr id="2" name="deckgen:decor"/>
           <p:cNvSpPr/>
           <p:nvPr/>
         </p:nvSpPr>
@@ -5499,7 +5499,7 @@
       </p:sp>
       <p:sp>
         <p:nvSpPr>
-          <p:cNvPr id="3" name="Oval 2"/>
+          <p:cNvPr id="3" name="deckgen:decor"/>
           <p:cNvSpPr/>
           <p:nvPr/>
         </p:nvSpPr>
@@ -5529,7 +5529,7 @@
       </p:sp>
       <p:sp>
         <p:nvSpPr>
-          <p:cNvPr id="4" name="Oval 3"/>
+          <p:cNvPr id="4" name="deckgen:decor"/>
           <p:cNvSpPr/>
           <p:nvPr/>
         </p:nvSpPr>
@@ -6314,7 +6314,7 @@
       <p:grpSpPr/>
       <p:sp>
         <p:nvSpPr>
-          <p:cNvPr id="2" name="Oval 1"/>
+          <p:cNvPr id="2" name="deckgen:decor"/>
           <p:cNvSpPr/>
           <p:nvPr/>
         </p:nvSpPr>
@@ -6344,7 +6344,7 @@
       </p:sp>
       <p:sp>
         <p:nvSpPr>
-          <p:cNvPr id="3" name="Oval 2"/>
+          <p:cNvPr id="3" name="deckgen:decor"/>
           <p:cNvSpPr/>
           <p:nvPr/>
         </p:nvSpPr>
@@ -6374,7 +6374,7 @@
       </p:sp>
       <p:sp>
         <p:nvSpPr>
-          <p:cNvPr id="4" name="Oval 3"/>
+          <p:cNvPr id="4" name="deckgen:decor"/>
           <p:cNvSpPr/>
           <p:nvPr/>
         </p:nvSpPr>
@@ -7507,7 +7507,7 @@
       <p:grpSpPr/>
       <p:sp>
         <p:nvSpPr>
-          <p:cNvPr id="2" name="Oval 1"/>
+          <p:cNvPr id="2" name="deckgen:decor"/>
           <p:cNvSpPr/>
           <p:nvPr/>
         </p:nvSpPr>
@@ -7537,7 +7537,7 @@
       </p:sp>
       <p:sp>
         <p:nvSpPr>
-          <p:cNvPr id="3" name="Oval 2"/>
+          <p:cNvPr id="3" name="deckgen:decor"/>
           <p:cNvSpPr/>
           <p:nvPr/>
         </p:nvSpPr>
@@ -7567,7 +7567,7 @@
       </p:sp>
       <p:sp>
         <p:nvSpPr>
-          <p:cNvPr id="4" name="Oval 3"/>
+          <p:cNvPr id="4" name="deckgen:decor"/>
           <p:cNvSpPr/>
           <p:nvPr/>
         </p:nvSpPr>
@@ -8600,7 +8600,7 @@
       <p:grpSpPr/>
       <p:sp>
         <p:nvSpPr>
-          <p:cNvPr id="2" name="Oval 1"/>
+          <p:cNvPr id="2" name="deckgen:decor"/>
           <p:cNvSpPr/>
           <p:nvPr/>
         </p:nvSpPr>
@@ -8630,7 +8630,7 @@
       </p:sp>
       <p:sp>
         <p:nvSpPr>
-          <p:cNvPr id="3" name="Oval 2"/>
+          <p:cNvPr id="3" name="deckgen:decor"/>
           <p:cNvSpPr/>
           <p:nvPr/>
         </p:nvSpPr>
@@ -8660,7 +8660,7 @@
       </p:sp>
       <p:sp>
         <p:nvSpPr>
-          <p:cNvPr id="4" name="Oval 3"/>
+          <p:cNvPr id="4" name="deckgen:decor"/>
           <p:cNvSpPr/>
           <p:nvPr/>
         </p:nvSpPr>
@@ -11203,7 +11203,7 @@
       <p:grpSpPr/>
       <p:sp>
         <p:nvSpPr>
-          <p:cNvPr id="2" name="Oval 1"/>
+          <p:cNvPr id="2" name="deckgen:decor"/>
           <p:cNvSpPr/>
           <p:nvPr/>
         </p:nvSpPr>
@@ -11233,7 +11233,7 @@
       </p:sp>
       <p:sp>
         <p:nvSpPr>
-          <p:cNvPr id="3" name="Oval 2"/>
+          <p:cNvPr id="3" name="deckgen:decor"/>
           <p:cNvSpPr/>
           <p:nvPr/>
         </p:nvSpPr>
@@ -11263,7 +11263,7 @@
       </p:sp>
       <p:sp>
         <p:nvSpPr>
-          <p:cNvPr id="4" name="Oval 3"/>
+          <p:cNvPr id="4" name="deckgen:decor"/>
           <p:cNvSpPr/>
           <p:nvPr/>
         </p:nvSpPr>
@@ -12414,7 +12414,7 @@
       <p:grpSpPr/>
       <p:sp>
         <p:nvSpPr>
-          <p:cNvPr id="2" name="Oval 1"/>
+          <p:cNvPr id="2" name="deckgen:decor"/>
           <p:cNvSpPr/>
           <p:nvPr/>
         </p:nvSpPr>
@@ -12444,7 +12444,7 @@
       </p:sp>
       <p:sp>
         <p:nvSpPr>
-          <p:cNvPr id="3" name="Oval 2"/>
+          <p:cNvPr id="3" name="deckgen:decor"/>
           <p:cNvSpPr/>
           <p:nvPr/>
         </p:nvSpPr>
@@ -12474,7 +12474,7 @@
       </p:sp>
       <p:sp>
         <p:nvSpPr>
-          <p:cNvPr id="4" name="Oval 3"/>
+          <p:cNvPr id="4" name="deckgen:decor"/>
           <p:cNvSpPr/>
           <p:nvPr/>
         </p:nvSpPr>
@@ -14642,7 +14642,7 @@
       <p:grpSpPr/>
       <p:sp>
         <p:nvSpPr>
-          <p:cNvPr id="2" name="Oval 1"/>
+          <p:cNvPr id="2" name="deckgen:decor"/>
           <p:cNvSpPr/>
           <p:nvPr/>
         </p:nvSpPr>
@@ -14672,7 +14672,7 @@
       </p:sp>
       <p:sp>
         <p:nvSpPr>
-          <p:cNvPr id="3" name="Oval 2"/>
+          <p:cNvPr id="3" name="deckgen:decor"/>
           <p:cNvSpPr/>
           <p:nvPr/>
         </p:nvSpPr>
@@ -14702,7 +14702,7 @@
       </p:sp>
       <p:sp>
         <p:nvSpPr>
-          <p:cNvPr id="4" name="Oval 3"/>
+          <p:cNvPr id="4" name="deckgen:decor"/>
           <p:cNvSpPr/>
           <p:nvPr/>
         </p:nvSpPr>
@@ -16353,7 +16353,7 @@
       <p:grpSpPr/>
       <p:sp>
         <p:nvSpPr>
-          <p:cNvPr id="2" name="Oval 1"/>
+          <p:cNvPr id="2" name="deckgen:decor"/>
           <p:cNvSpPr/>
           <p:nvPr/>
         </p:nvSpPr>
@@ -16383,7 +16383,7 @@
       </p:sp>
       <p:sp>
         <p:nvSpPr>
-          <p:cNvPr id="3" name="Oval 2"/>
+          <p:cNvPr id="3" name="deckgen:decor"/>
           <p:cNvSpPr/>
           <p:nvPr/>
         </p:nvSpPr>
@@ -16413,7 +16413,7 @@
       </p:sp>
       <p:sp>
         <p:nvSpPr>
-          <p:cNvPr id="4" name="Oval 3"/>
+          <p:cNvPr id="4" name="deckgen:decor"/>
           <p:cNvSpPr/>
           <p:nvPr/>
         </p:nvSpPr>
